--- a/sjoskolan/vecka-39/aktuell/v39_04_Kirchhoff_seminarium_elev.pptx
+++ b/sjoskolan/vecka-39/aktuell/v39_04_Kirchhoff_seminarium_elev.pptx
@@ -10898,7 +10898,7 @@
                 <a:ea typeface="Calibri"/>
                 <a:cs typeface="Calibri"/>
               </a:rPr>
-              <a:t>1. Ström i en förgrening</a:t>
+              <a:t>Övning 2.11. Ström i en förgrening</a:t>
             </a:r>
           </a:p>
         </p:txBody>
@@ -12248,7 +12248,7 @@
                 <a:ea typeface="Calibri"/>
                 <a:cs typeface="Calibri"/>
               </a:rPr>
-              <a:t>2. Flera strömmar vid en nod</a:t>
+              <a:t>Övning 2.12. Flera strömmar vid en nod</a:t>
             </a:r>
           </a:p>
         </p:txBody>
@@ -13776,7 +13776,7 @@
                 <a:ea typeface="Calibri"/>
                 <a:cs typeface="Calibri"/>
               </a:rPr>
-              <a:t>3. En antagen strömriktning</a:t>
+              <a:t>Övning 2.13. En antagen strömriktning</a:t>
             </a:r>
           </a:p>
         </p:txBody>
@@ -15126,7 +15126,7 @@
                 <a:ea typeface="Calibri"/>
                 <a:cs typeface="Calibri"/>
               </a:rPr>
-              <a:t>4. Det saknade spänningsfallet</a:t>
+              <a:t>Övning 2.14. Det saknade spänningsfallet</a:t>
             </a:r>
           </a:p>
         </p:txBody>
@@ -16709,7 +16709,7 @@
                 <a:ea typeface="Calibri"/>
                 <a:cs typeface="Calibri"/>
               </a:rPr>
-              <a:t>5. Ström och spänning i serie</a:t>
+              <a:t>Övning 2.15. Ström och spänning i serie</a:t>
             </a:r>
           </a:p>
         </p:txBody>
@@ -19656,7 +19656,7 @@
                 <a:ea typeface="Calibri"/>
                 <a:cs typeface="Calibri"/>
               </a:rPr>
-              <a:t>6. Två parallella grenar</a:t>
+              <a:t>Övning 2.16. Två parallella grenar</a:t>
             </a:r>
           </a:p>
         </p:txBody>
@@ -21509,7 +21509,7 @@
                 <a:ea typeface="Calibri"/>
                 <a:cs typeface="Calibri"/>
               </a:rPr>
-              <a:t>7. Serie och parallell samtidigt</a:t>
+              <a:t>Övning 2.17. Serie och parallell samtidigt</a:t>
             </a:r>
           </a:p>
         </p:txBody>
@@ -23482,7 +23482,7 @@
                 <a:ea typeface="Calibri"/>
                 <a:cs typeface="Calibri"/>
               </a:rPr>
-              <a:t>8. Källor som motverkar varandra</a:t>
+              <a:t>Övning 2.18. Källor som motverkar varandra</a:t>
             </a:r>
           </a:p>
         </p:txBody>
@@ -25205,7 +25205,7 @@
                 <a:ea typeface="Calibri"/>
                 <a:cs typeface="Calibri"/>
               </a:rPr>
-              <a:t>9. Två källor matar samma last</a:t>
+              <a:t>Övning 2.19. Två källor matar samma last</a:t>
             </a:r>
           </a:p>
         </p:txBody>
@@ -27957,7 +27957,7 @@
                 <a:ea typeface="Calibri"/>
                 <a:cs typeface="Calibri"/>
               </a:rPr>
-              <a:t>10. Strömmen byter riktning</a:t>
+              <a:t>Övning 2.20. Strömmen byter riktning</a:t>
             </a:r>
           </a:p>
         </p:txBody>
@@ -28015,7 +28015,73 @@
                 <a:ea typeface="Calibri"/>
                 <a:cs typeface="Calibri"/>
               </a:rPr>
-              <a:t>Nu ger källorna 18 V och 3 V. R₁ = R₂ = 3 Ω och R₃ = 2 Ω. Pilarna är samma som i uppgift 9.</a:t>
+              <a:t>Nu ger källorna 18 V och 3 V. R</a:t>
+            </a:r>
+            <a:r>
+              <a:rPr sz="2000" b="0" baseline="-25000">
+                <a:solidFill>
+                  <a:srgbClr val="111111"/>
+                </a:solidFill>
+                <a:latin typeface="Calibri"/>
+                <a:ea typeface="Calibri"/>
+                <a:cs typeface="Calibri"/>
+              </a:rPr>
+              <a:t>1</a:t>
+            </a:r>
+            <a:r>
+              <a:rPr sz="2000" b="0">
+                <a:solidFill>
+                  <a:srgbClr val="111111"/>
+                </a:solidFill>
+                <a:latin typeface="Calibri"/>
+                <a:ea typeface="Calibri"/>
+                <a:cs typeface="Calibri"/>
+              </a:rPr>
+              <a:t> = R</a:t>
+            </a:r>
+            <a:r>
+              <a:rPr sz="2000" b="0" baseline="-25000">
+                <a:solidFill>
+                  <a:srgbClr val="111111"/>
+                </a:solidFill>
+                <a:latin typeface="Calibri"/>
+                <a:ea typeface="Calibri"/>
+                <a:cs typeface="Calibri"/>
+              </a:rPr>
+              <a:t>2</a:t>
+            </a:r>
+            <a:r>
+              <a:rPr sz="2000" b="0">
+                <a:solidFill>
+                  <a:srgbClr val="111111"/>
+                </a:solidFill>
+                <a:latin typeface="Calibri"/>
+                <a:ea typeface="Calibri"/>
+                <a:cs typeface="Calibri"/>
+              </a:rPr>
+              <a:t> = 3 Ω och R</a:t>
+            </a:r>
+            <a:r>
+              <a:rPr sz="2000" b="0" baseline="-25000">
+                <a:solidFill>
+                  <a:srgbClr val="111111"/>
+                </a:solidFill>
+                <a:latin typeface="Calibri"/>
+                <a:ea typeface="Calibri"/>
+                <a:cs typeface="Calibri"/>
+              </a:rPr>
+              <a:t>3</a:t>
+            </a:r>
+            <a:r>
+              <a:rPr sz="2000" b="0">
+                <a:solidFill>
+                  <a:srgbClr val="111111"/>
+                </a:solidFill>
+                <a:latin typeface="Calibri"/>
+                <a:ea typeface="Calibri"/>
+                <a:cs typeface="Calibri"/>
+              </a:rPr>
+              <a:t> = 2 Ω. Pilarna är samma som i föregående övning.</a:t>
             </a:r>
           </a:p>
         </p:txBody>

--- a/sjoskolan/vecka-39/aktuell/v39_04_Kirchhoff_seminarium_elev.pptx
+++ b/sjoskolan/vecka-39/aktuell/v39_04_Kirchhoff_seminarium_elev.pptx
@@ -3518,6 +3518,10 @@
             <a:noFill/>
           </a:ln>
         </p:spPr>
+        <p:txBody xmlns:a="http://schemas.openxmlformats.org/drawingml/2006/main">
+          <a:bodyPr/>
+          <a:p/>
+        </p:txBody>
       </p:sp>
       <p:sp>
         <p:nvSpPr>
@@ -6404,6 +6408,10 @@
             </a:solidFill>
           </a:ln>
         </p:spPr>
+        <p:txBody xmlns:a="http://schemas.openxmlformats.org/drawingml/2006/main">
+          <a:bodyPr/>
+          <a:p/>
+        </p:txBody>
       </p:sp>
       <p:sp>
         <p:nvSpPr>
@@ -6436,6 +6444,10 @@
             </a:solidFill>
           </a:ln>
         </p:spPr>
+        <p:txBody xmlns:a="http://schemas.openxmlformats.org/drawingml/2006/main">
+          <a:bodyPr/>
+          <a:p/>
+        </p:txBody>
       </p:sp>
       <p:sp>
         <p:nvSpPr>
@@ -6466,6 +6478,10 @@
             </a:solidFill>
           </a:ln>
         </p:spPr>
+        <p:txBody xmlns:a="http://schemas.openxmlformats.org/drawingml/2006/main">
+          <a:bodyPr/>
+          <a:p/>
+        </p:txBody>
       </p:sp>
       <p:sp>
         <p:nvSpPr>
@@ -6670,6 +6686,10 @@
             </a:solidFill>
           </a:ln>
         </p:spPr>
+        <p:txBody xmlns:a="http://schemas.openxmlformats.org/drawingml/2006/main">
+          <a:bodyPr/>
+          <a:p/>
+        </p:txBody>
       </p:sp>
       <p:sp>
         <p:nvSpPr>
@@ -6702,6 +6722,10 @@
             </a:solidFill>
           </a:ln>
         </p:spPr>
+        <p:txBody xmlns:a="http://schemas.openxmlformats.org/drawingml/2006/main">
+          <a:bodyPr/>
+          <a:p/>
+        </p:txBody>
       </p:sp>
       <p:sp>
         <p:nvSpPr>
@@ -6732,6 +6756,10 @@
             </a:solidFill>
           </a:ln>
         </p:spPr>
+        <p:txBody xmlns:a="http://schemas.openxmlformats.org/drawingml/2006/main">
+          <a:bodyPr/>
+          <a:p/>
+        </p:txBody>
       </p:sp>
       <p:sp>
         <p:nvSpPr>
@@ -6936,6 +6964,10 @@
             </a:solidFill>
           </a:ln>
         </p:spPr>
+        <p:txBody xmlns:a="http://schemas.openxmlformats.org/drawingml/2006/main">
+          <a:bodyPr/>
+          <a:p/>
+        </p:txBody>
       </p:sp>
       <p:sp>
         <p:nvSpPr>
@@ -6968,6 +7000,10 @@
             </a:solidFill>
           </a:ln>
         </p:spPr>
+        <p:txBody xmlns:a="http://schemas.openxmlformats.org/drawingml/2006/main">
+          <a:bodyPr/>
+          <a:p/>
+        </p:txBody>
       </p:sp>
       <p:sp>
         <p:nvSpPr>
@@ -6998,6 +7034,10 @@
             </a:solidFill>
           </a:ln>
         </p:spPr>
+        <p:txBody xmlns:a="http://schemas.openxmlformats.org/drawingml/2006/main">
+          <a:bodyPr/>
+          <a:p/>
+        </p:txBody>
       </p:sp>
       <p:sp>
         <p:nvSpPr>
@@ -7086,6 +7126,10 @@
             </a:solidFill>
           </a:ln>
         </p:spPr>
+        <p:txBody xmlns:a="http://schemas.openxmlformats.org/drawingml/2006/main">
+          <a:bodyPr/>
+          <a:p/>
+        </p:txBody>
       </p:sp>
       <p:sp>
         <p:nvSpPr>
@@ -7116,6 +7160,10 @@
             </a:solidFill>
           </a:ln>
         </p:spPr>
+        <p:txBody xmlns:a="http://schemas.openxmlformats.org/drawingml/2006/main">
+          <a:bodyPr/>
+          <a:p/>
+        </p:txBody>
       </p:sp>
       <p:sp>
         <p:nvSpPr>
@@ -7148,6 +7196,10 @@
             </a:solidFill>
           </a:ln>
         </p:spPr>
+        <p:txBody xmlns:a="http://schemas.openxmlformats.org/drawingml/2006/main">
+          <a:bodyPr/>
+          <a:p/>
+        </p:txBody>
       </p:sp>
       <p:sp>
         <p:nvSpPr>
@@ -7178,6 +7230,10 @@
             </a:solidFill>
           </a:ln>
         </p:spPr>
+        <p:txBody xmlns:a="http://schemas.openxmlformats.org/drawingml/2006/main">
+          <a:bodyPr/>
+          <a:p/>
+        </p:txBody>
       </p:sp>
       <p:sp>
         <p:nvSpPr>
@@ -7266,6 +7322,10 @@
             </a:solidFill>
           </a:ln>
         </p:spPr>
+        <p:txBody xmlns:a="http://schemas.openxmlformats.org/drawingml/2006/main">
+          <a:bodyPr/>
+          <a:p/>
+        </p:txBody>
       </p:sp>
       <p:sp>
         <p:nvSpPr>
@@ -7298,6 +7358,10 @@
             </a:solidFill>
           </a:ln>
         </p:spPr>
+        <p:txBody xmlns:a="http://schemas.openxmlformats.org/drawingml/2006/main">
+          <a:bodyPr/>
+          <a:p/>
+        </p:txBody>
       </p:sp>
       <p:sp>
         <p:nvSpPr>
@@ -7330,6 +7394,10 @@
             </a:solidFill>
           </a:ln>
         </p:spPr>
+        <p:txBody xmlns:a="http://schemas.openxmlformats.org/drawingml/2006/main">
+          <a:bodyPr/>
+          <a:p/>
+        </p:txBody>
       </p:sp>
       <p:sp>
         <p:nvSpPr>
@@ -7812,6 +7880,10 @@
             </a:solidFill>
           </a:ln>
         </p:spPr>
+        <p:txBody xmlns:a="http://schemas.openxmlformats.org/drawingml/2006/main">
+          <a:bodyPr/>
+          <a:p/>
+        </p:txBody>
       </p:sp>
       <p:sp>
         <p:nvSpPr>
@@ -7844,6 +7916,10 @@
             </a:solidFill>
           </a:ln>
         </p:spPr>
+        <p:txBody xmlns:a="http://schemas.openxmlformats.org/drawingml/2006/main">
+          <a:bodyPr/>
+          <a:p/>
+        </p:txBody>
       </p:sp>
       <p:sp>
         <p:nvSpPr>
@@ -7874,6 +7950,10 @@
             </a:solidFill>
           </a:ln>
         </p:spPr>
+        <p:txBody xmlns:a="http://schemas.openxmlformats.org/drawingml/2006/main">
+          <a:bodyPr/>
+          <a:p/>
+        </p:txBody>
       </p:sp>
       <p:sp>
         <p:nvSpPr>
@@ -8078,6 +8158,10 @@
             </a:solidFill>
           </a:ln>
         </p:spPr>
+        <p:txBody xmlns:a="http://schemas.openxmlformats.org/drawingml/2006/main">
+          <a:bodyPr/>
+          <a:p/>
+        </p:txBody>
       </p:sp>
       <p:sp>
         <p:nvSpPr>
@@ -8108,6 +8192,10 @@
             </a:solidFill>
           </a:ln>
         </p:spPr>
+        <p:txBody xmlns:a="http://schemas.openxmlformats.org/drawingml/2006/main">
+          <a:bodyPr/>
+          <a:p/>
+        </p:txBody>
       </p:sp>
       <p:sp>
         <p:nvSpPr>
@@ -8140,6 +8228,10 @@
             </a:solidFill>
           </a:ln>
         </p:spPr>
+        <p:txBody xmlns:a="http://schemas.openxmlformats.org/drawingml/2006/main">
+          <a:bodyPr/>
+          <a:p/>
+        </p:txBody>
       </p:sp>
       <p:sp>
         <p:nvSpPr>
@@ -8170,6 +8262,10 @@
             </a:solidFill>
           </a:ln>
         </p:spPr>
+        <p:txBody xmlns:a="http://schemas.openxmlformats.org/drawingml/2006/main">
+          <a:bodyPr/>
+          <a:p/>
+        </p:txBody>
       </p:sp>
       <p:sp>
         <p:nvSpPr>
@@ -8258,6 +8354,10 @@
             </a:solidFill>
           </a:ln>
         </p:spPr>
+        <p:txBody xmlns:a="http://schemas.openxmlformats.org/drawingml/2006/main">
+          <a:bodyPr/>
+          <a:p/>
+        </p:txBody>
       </p:sp>
       <p:sp>
         <p:nvSpPr>
@@ -8290,6 +8390,10 @@
             </a:solidFill>
           </a:ln>
         </p:spPr>
+        <p:txBody xmlns:a="http://schemas.openxmlformats.org/drawingml/2006/main">
+          <a:bodyPr/>
+          <a:p/>
+        </p:txBody>
       </p:sp>
       <p:sp>
         <p:nvSpPr>
@@ -8320,6 +8424,10 @@
             </a:solidFill>
           </a:ln>
         </p:spPr>
+        <p:txBody xmlns:a="http://schemas.openxmlformats.org/drawingml/2006/main">
+          <a:bodyPr/>
+          <a:p/>
+        </p:txBody>
       </p:sp>
       <p:sp>
         <p:nvSpPr>
@@ -8408,6 +8516,10 @@
             </a:solidFill>
           </a:ln>
         </p:spPr>
+        <p:txBody xmlns:a="http://schemas.openxmlformats.org/drawingml/2006/main">
+          <a:bodyPr/>
+          <a:p/>
+        </p:txBody>
       </p:sp>
       <p:sp>
         <p:nvSpPr>
@@ -8554,6 +8666,10 @@
             </a:solidFill>
           </a:ln>
         </p:spPr>
+        <p:txBody xmlns:a="http://schemas.openxmlformats.org/drawingml/2006/main">
+          <a:bodyPr/>
+          <a:p/>
+        </p:txBody>
       </p:sp>
       <p:sp>
         <p:nvSpPr>
@@ -8584,6 +8700,10 @@
             </a:solidFill>
           </a:ln>
         </p:spPr>
+        <p:txBody xmlns:a="http://schemas.openxmlformats.org/drawingml/2006/main">
+          <a:bodyPr/>
+          <a:p/>
+        </p:txBody>
       </p:sp>
       <p:sp>
         <p:nvSpPr>
@@ -8614,6 +8734,10 @@
             </a:solidFill>
           </a:ln>
         </p:spPr>
+        <p:txBody xmlns:a="http://schemas.openxmlformats.org/drawingml/2006/main">
+          <a:bodyPr/>
+          <a:p/>
+        </p:txBody>
       </p:sp>
       <p:sp>
         <p:nvSpPr>
@@ -10052,7 +10176,29 @@
                 <a:ea typeface="Calibri"/>
                 <a:cs typeface="Calibri"/>
               </a:rPr>
-              <a:t>Iin = Ikänd ut + Iₓ</a:t>
+              <a:t>I</a:t>
+            </a:r>
+            <a:r>
+              <a:rPr sz="2400" b="1" baseline="-25000">
+                <a:solidFill>
+                  <a:srgbClr val="064F91"/>
+                </a:solidFill>
+                <a:latin typeface="Calibri"/>
+                <a:ea typeface="Calibri"/>
+                <a:cs typeface="Calibri"/>
+              </a:rPr>
+              <a:t>in</a:t>
+            </a:r>
+            <a:r>
+              <a:rPr sz="2400" b="1">
+                <a:solidFill>
+                  <a:srgbClr val="064F91"/>
+                </a:solidFill>
+                <a:latin typeface="Calibri"/>
+                <a:ea typeface="Calibri"/>
+                <a:cs typeface="Calibri"/>
+              </a:rPr>
+              <a:t> = Ikänd ut + Iₓ</a:t>
             </a:r>
           </a:p>
         </p:txBody>
@@ -10990,6 +11136,10 @@
             </a:solidFill>
           </a:ln>
         </p:spPr>
+        <p:txBody xmlns:a="http://schemas.openxmlformats.org/drawingml/2006/main">
+          <a:bodyPr/>
+          <a:p/>
+        </p:txBody>
       </p:sp>
       <p:sp>
         <p:nvSpPr>
@@ -11020,6 +11170,10 @@
             </a:solidFill>
           </a:ln>
         </p:spPr>
+        <p:txBody xmlns:a="http://schemas.openxmlformats.org/drawingml/2006/main">
+          <a:bodyPr/>
+          <a:p/>
+        </p:txBody>
       </p:sp>
       <p:sp>
         <p:nvSpPr>
@@ -11050,6 +11204,10 @@
             </a:solidFill>
           </a:ln>
         </p:spPr>
+        <p:txBody xmlns:a="http://schemas.openxmlformats.org/drawingml/2006/main">
+          <a:bodyPr/>
+          <a:p/>
+        </p:txBody>
       </p:sp>
       <p:sp>
         <p:nvSpPr>
@@ -11080,6 +11238,10 @@
             </a:solidFill>
           </a:ln>
         </p:spPr>
+        <p:txBody xmlns:a="http://schemas.openxmlformats.org/drawingml/2006/main">
+          <a:bodyPr/>
+          <a:p/>
+        </p:txBody>
       </p:sp>
       <p:sp>
         <p:nvSpPr>
@@ -11110,6 +11272,10 @@
             </a:solidFill>
           </a:ln>
         </p:spPr>
+        <p:txBody xmlns:a="http://schemas.openxmlformats.org/drawingml/2006/main">
+          <a:bodyPr/>
+          <a:p/>
+        </p:txBody>
       </p:sp>
       <p:sp>
         <p:nvSpPr>
@@ -11142,6 +11308,10 @@
             </a:solidFill>
           </a:ln>
         </p:spPr>
+        <p:txBody xmlns:a="http://schemas.openxmlformats.org/drawingml/2006/main">
+          <a:bodyPr/>
+          <a:p/>
+        </p:txBody>
       </p:sp>
       <p:sp>
         <p:nvSpPr>
@@ -11172,6 +11342,10 @@
             </a:solidFill>
           </a:ln>
         </p:spPr>
+        <p:txBody xmlns:a="http://schemas.openxmlformats.org/drawingml/2006/main">
+          <a:bodyPr/>
+          <a:p/>
+        </p:txBody>
       </p:sp>
       <p:sp>
         <p:nvSpPr>
@@ -11202,6 +11376,10 @@
             </a:solidFill>
           </a:ln>
         </p:spPr>
+        <p:txBody xmlns:a="http://schemas.openxmlformats.org/drawingml/2006/main">
+          <a:bodyPr/>
+          <a:p/>
+        </p:txBody>
       </p:sp>
       <p:sp>
         <p:nvSpPr>
@@ -11232,6 +11410,10 @@
             </a:solidFill>
           </a:ln>
         </p:spPr>
+        <p:txBody xmlns:a="http://schemas.openxmlformats.org/drawingml/2006/main">
+          <a:bodyPr/>
+          <a:p/>
+        </p:txBody>
       </p:sp>
       <p:sp>
         <p:nvSpPr>
@@ -11320,6 +11502,10 @@
             </a:solidFill>
           </a:ln>
         </p:spPr>
+        <p:txBody xmlns:a="http://schemas.openxmlformats.org/drawingml/2006/main">
+          <a:bodyPr/>
+          <a:p/>
+        </p:txBody>
       </p:sp>
       <p:sp>
         <p:nvSpPr>
@@ -11350,6 +11536,10 @@
             </a:solidFill>
           </a:ln>
         </p:spPr>
+        <p:txBody xmlns:a="http://schemas.openxmlformats.org/drawingml/2006/main">
+          <a:bodyPr/>
+          <a:p/>
+        </p:txBody>
       </p:sp>
       <p:sp>
         <p:nvSpPr>
@@ -11380,6 +11570,10 @@
             </a:solidFill>
           </a:ln>
         </p:spPr>
+        <p:txBody xmlns:a="http://schemas.openxmlformats.org/drawingml/2006/main">
+          <a:bodyPr/>
+          <a:p/>
+        </p:txBody>
       </p:sp>
       <p:sp>
         <p:nvSpPr>
@@ -11468,6 +11662,10 @@
             </a:solidFill>
           </a:ln>
         </p:spPr>
+        <p:txBody xmlns:a="http://schemas.openxmlformats.org/drawingml/2006/main">
+          <a:bodyPr/>
+          <a:p/>
+        </p:txBody>
       </p:sp>
       <p:sp>
         <p:nvSpPr>
@@ -11498,6 +11696,10 @@
             </a:solidFill>
           </a:ln>
         </p:spPr>
+        <p:txBody xmlns:a="http://schemas.openxmlformats.org/drawingml/2006/main">
+          <a:bodyPr/>
+          <a:p/>
+        </p:txBody>
       </p:sp>
       <p:sp>
         <p:nvSpPr>
@@ -11528,6 +11730,10 @@
             </a:solidFill>
           </a:ln>
         </p:spPr>
+        <p:txBody xmlns:a="http://schemas.openxmlformats.org/drawingml/2006/main">
+          <a:bodyPr/>
+          <a:p/>
+        </p:txBody>
       </p:sp>
       <p:sp>
         <p:nvSpPr>
@@ -12340,6 +12546,10 @@
             </a:solidFill>
           </a:ln>
         </p:spPr>
+        <p:txBody xmlns:a="http://schemas.openxmlformats.org/drawingml/2006/main">
+          <a:bodyPr/>
+          <a:p/>
+        </p:txBody>
       </p:sp>
       <p:sp>
         <p:nvSpPr>
@@ -12370,6 +12580,10 @@
             </a:solidFill>
           </a:ln>
         </p:spPr>
+        <p:txBody xmlns:a="http://schemas.openxmlformats.org/drawingml/2006/main">
+          <a:bodyPr/>
+          <a:p/>
+        </p:txBody>
       </p:sp>
       <p:sp>
         <p:nvSpPr>
@@ -12400,6 +12614,10 @@
             </a:solidFill>
           </a:ln>
         </p:spPr>
+        <p:txBody xmlns:a="http://schemas.openxmlformats.org/drawingml/2006/main">
+          <a:bodyPr/>
+          <a:p/>
+        </p:txBody>
       </p:sp>
       <p:sp>
         <p:nvSpPr>
@@ -12430,6 +12648,10 @@
             </a:solidFill>
           </a:ln>
         </p:spPr>
+        <p:txBody xmlns:a="http://schemas.openxmlformats.org/drawingml/2006/main">
+          <a:bodyPr/>
+          <a:p/>
+        </p:txBody>
       </p:sp>
       <p:sp>
         <p:nvSpPr>
@@ -12460,6 +12682,10 @@
             </a:solidFill>
           </a:ln>
         </p:spPr>
+        <p:txBody xmlns:a="http://schemas.openxmlformats.org/drawingml/2006/main">
+          <a:bodyPr/>
+          <a:p/>
+        </p:txBody>
       </p:sp>
       <p:sp>
         <p:nvSpPr>
@@ -12492,6 +12718,10 @@
             </a:solidFill>
           </a:ln>
         </p:spPr>
+        <p:txBody xmlns:a="http://schemas.openxmlformats.org/drawingml/2006/main">
+          <a:bodyPr/>
+          <a:p/>
+        </p:txBody>
       </p:sp>
       <p:sp>
         <p:nvSpPr>
@@ -12522,6 +12752,10 @@
             </a:solidFill>
           </a:ln>
         </p:spPr>
+        <p:txBody xmlns:a="http://schemas.openxmlformats.org/drawingml/2006/main">
+          <a:bodyPr/>
+          <a:p/>
+        </p:txBody>
       </p:sp>
       <p:sp>
         <p:nvSpPr>
@@ -12552,6 +12786,10 @@
             </a:solidFill>
           </a:ln>
         </p:spPr>
+        <p:txBody xmlns:a="http://schemas.openxmlformats.org/drawingml/2006/main">
+          <a:bodyPr/>
+          <a:p/>
+        </p:txBody>
       </p:sp>
       <p:sp>
         <p:nvSpPr>
@@ -12582,6 +12820,10 @@
             </a:solidFill>
           </a:ln>
         </p:spPr>
+        <p:txBody xmlns:a="http://schemas.openxmlformats.org/drawingml/2006/main">
+          <a:bodyPr/>
+          <a:p/>
+        </p:txBody>
       </p:sp>
       <p:sp>
         <p:nvSpPr>
@@ -12670,6 +12912,10 @@
             </a:solidFill>
           </a:ln>
         </p:spPr>
+        <p:txBody xmlns:a="http://schemas.openxmlformats.org/drawingml/2006/main">
+          <a:bodyPr/>
+          <a:p/>
+        </p:txBody>
       </p:sp>
       <p:sp>
         <p:nvSpPr>
@@ -12700,6 +12946,10 @@
             </a:solidFill>
           </a:ln>
         </p:spPr>
+        <p:txBody xmlns:a="http://schemas.openxmlformats.org/drawingml/2006/main">
+          <a:bodyPr/>
+          <a:p/>
+        </p:txBody>
       </p:sp>
       <p:sp>
         <p:nvSpPr>
@@ -12730,6 +12980,10 @@
             </a:solidFill>
           </a:ln>
         </p:spPr>
+        <p:txBody xmlns:a="http://schemas.openxmlformats.org/drawingml/2006/main">
+          <a:bodyPr/>
+          <a:p/>
+        </p:txBody>
       </p:sp>
       <p:sp>
         <p:nvSpPr>
@@ -12818,6 +13072,10 @@
             </a:solidFill>
           </a:ln>
         </p:spPr>
+        <p:txBody xmlns:a="http://schemas.openxmlformats.org/drawingml/2006/main">
+          <a:bodyPr/>
+          <a:p/>
+        </p:txBody>
       </p:sp>
       <p:sp>
         <p:nvSpPr>
@@ -12848,6 +13106,10 @@
             </a:solidFill>
           </a:ln>
         </p:spPr>
+        <p:txBody xmlns:a="http://schemas.openxmlformats.org/drawingml/2006/main">
+          <a:bodyPr/>
+          <a:p/>
+        </p:txBody>
       </p:sp>
       <p:sp>
         <p:nvSpPr>
@@ -12878,6 +13140,10 @@
             </a:solidFill>
           </a:ln>
         </p:spPr>
+        <p:txBody xmlns:a="http://schemas.openxmlformats.org/drawingml/2006/main">
+          <a:bodyPr/>
+          <a:p/>
+        </p:txBody>
       </p:sp>
       <p:sp>
         <p:nvSpPr>
@@ -13024,6 +13290,10 @@
             </a:solidFill>
           </a:ln>
         </p:spPr>
+        <p:txBody xmlns:a="http://schemas.openxmlformats.org/drawingml/2006/main">
+          <a:bodyPr/>
+          <a:p/>
+        </p:txBody>
       </p:sp>
       <p:sp>
         <p:nvSpPr>
@@ -13054,6 +13324,10 @@
             </a:solidFill>
           </a:ln>
         </p:spPr>
+        <p:txBody xmlns:a="http://schemas.openxmlformats.org/drawingml/2006/main">
+          <a:bodyPr/>
+          <a:p/>
+        </p:txBody>
       </p:sp>
       <p:sp>
         <p:nvSpPr>
@@ -13084,6 +13358,10 @@
             </a:solidFill>
           </a:ln>
         </p:spPr>
+        <p:txBody xmlns:a="http://schemas.openxmlformats.org/drawingml/2006/main">
+          <a:bodyPr/>
+          <a:p/>
+        </p:txBody>
       </p:sp>
       <p:sp>
         <p:nvSpPr>
@@ -13114,6 +13392,10 @@
             </a:solidFill>
           </a:ln>
         </p:spPr>
+        <p:txBody xmlns:a="http://schemas.openxmlformats.org/drawingml/2006/main">
+          <a:bodyPr/>
+          <a:p/>
+        </p:txBody>
       </p:sp>
       <p:sp>
         <p:nvSpPr>
@@ -13868,6 +14150,10 @@
             </a:solidFill>
           </a:ln>
         </p:spPr>
+        <p:txBody xmlns:a="http://schemas.openxmlformats.org/drawingml/2006/main">
+          <a:bodyPr/>
+          <a:p/>
+        </p:txBody>
       </p:sp>
       <p:sp>
         <p:nvSpPr>
@@ -13898,6 +14184,10 @@
             </a:solidFill>
           </a:ln>
         </p:spPr>
+        <p:txBody xmlns:a="http://schemas.openxmlformats.org/drawingml/2006/main">
+          <a:bodyPr/>
+          <a:p/>
+        </p:txBody>
       </p:sp>
       <p:sp>
         <p:nvSpPr>
@@ -13928,6 +14218,10 @@
             </a:solidFill>
           </a:ln>
         </p:spPr>
+        <p:txBody xmlns:a="http://schemas.openxmlformats.org/drawingml/2006/main">
+          <a:bodyPr/>
+          <a:p/>
+        </p:txBody>
       </p:sp>
       <p:sp>
         <p:nvSpPr>
@@ -13958,6 +14252,10 @@
             </a:solidFill>
           </a:ln>
         </p:spPr>
+        <p:txBody xmlns:a="http://schemas.openxmlformats.org/drawingml/2006/main">
+          <a:bodyPr/>
+          <a:p/>
+        </p:txBody>
       </p:sp>
       <p:sp>
         <p:nvSpPr>
@@ -13988,6 +14286,10 @@
             </a:solidFill>
           </a:ln>
         </p:spPr>
+        <p:txBody xmlns:a="http://schemas.openxmlformats.org/drawingml/2006/main">
+          <a:bodyPr/>
+          <a:p/>
+        </p:txBody>
       </p:sp>
       <p:sp>
         <p:nvSpPr>
@@ -14020,6 +14322,10 @@
             </a:solidFill>
           </a:ln>
         </p:spPr>
+        <p:txBody xmlns:a="http://schemas.openxmlformats.org/drawingml/2006/main">
+          <a:bodyPr/>
+          <a:p/>
+        </p:txBody>
       </p:sp>
       <p:sp>
         <p:nvSpPr>
@@ -14050,6 +14356,10 @@
             </a:solidFill>
           </a:ln>
         </p:spPr>
+        <p:txBody xmlns:a="http://schemas.openxmlformats.org/drawingml/2006/main">
+          <a:bodyPr/>
+          <a:p/>
+        </p:txBody>
       </p:sp>
       <p:sp>
         <p:nvSpPr>
@@ -14080,6 +14390,10 @@
             </a:solidFill>
           </a:ln>
         </p:spPr>
+        <p:txBody xmlns:a="http://schemas.openxmlformats.org/drawingml/2006/main">
+          <a:bodyPr/>
+          <a:p/>
+        </p:txBody>
       </p:sp>
       <p:sp>
         <p:nvSpPr>
@@ -14110,6 +14424,10 @@
             </a:solidFill>
           </a:ln>
         </p:spPr>
+        <p:txBody xmlns:a="http://schemas.openxmlformats.org/drawingml/2006/main">
+          <a:bodyPr/>
+          <a:p/>
+        </p:txBody>
       </p:sp>
       <p:sp>
         <p:nvSpPr>
@@ -14198,6 +14516,10 @@
             </a:solidFill>
           </a:ln>
         </p:spPr>
+        <p:txBody xmlns:a="http://schemas.openxmlformats.org/drawingml/2006/main">
+          <a:bodyPr/>
+          <a:p/>
+        </p:txBody>
       </p:sp>
       <p:sp>
         <p:nvSpPr>
@@ -14228,6 +14550,10 @@
             </a:solidFill>
           </a:ln>
         </p:spPr>
+        <p:txBody xmlns:a="http://schemas.openxmlformats.org/drawingml/2006/main">
+          <a:bodyPr/>
+          <a:p/>
+        </p:txBody>
       </p:sp>
       <p:sp>
         <p:nvSpPr>
@@ -14258,6 +14584,10 @@
             </a:solidFill>
           </a:ln>
         </p:spPr>
+        <p:txBody xmlns:a="http://schemas.openxmlformats.org/drawingml/2006/main">
+          <a:bodyPr/>
+          <a:p/>
+        </p:txBody>
       </p:sp>
       <p:sp>
         <p:nvSpPr>
@@ -14346,6 +14676,10 @@
             </a:solidFill>
           </a:ln>
         </p:spPr>
+        <p:txBody xmlns:a="http://schemas.openxmlformats.org/drawingml/2006/main">
+          <a:bodyPr/>
+          <a:p/>
+        </p:txBody>
       </p:sp>
       <p:sp>
         <p:nvSpPr>
@@ -14376,6 +14710,10 @@
             </a:solidFill>
           </a:ln>
         </p:spPr>
+        <p:txBody xmlns:a="http://schemas.openxmlformats.org/drawingml/2006/main">
+          <a:bodyPr/>
+          <a:p/>
+        </p:txBody>
       </p:sp>
       <p:sp>
         <p:nvSpPr>
@@ -14406,6 +14744,10 @@
             </a:solidFill>
           </a:ln>
         </p:spPr>
+        <p:txBody xmlns:a="http://schemas.openxmlformats.org/drawingml/2006/main">
+          <a:bodyPr/>
+          <a:p/>
+        </p:txBody>
       </p:sp>
       <p:sp>
         <p:nvSpPr>
@@ -15218,6 +15560,10 @@
             </a:solidFill>
           </a:ln>
         </p:spPr>
+        <p:txBody xmlns:a="http://schemas.openxmlformats.org/drawingml/2006/main">
+          <a:bodyPr/>
+          <a:p/>
+        </p:txBody>
       </p:sp>
       <p:sp>
         <p:nvSpPr>
@@ -15250,6 +15596,10 @@
             </a:solidFill>
           </a:ln>
         </p:spPr>
+        <p:txBody xmlns:a="http://schemas.openxmlformats.org/drawingml/2006/main">
+          <a:bodyPr/>
+          <a:p/>
+        </p:txBody>
       </p:sp>
       <p:sp>
         <p:nvSpPr>
@@ -15280,6 +15630,10 @@
             </a:solidFill>
           </a:ln>
         </p:spPr>
+        <p:txBody xmlns:a="http://schemas.openxmlformats.org/drawingml/2006/main">
+          <a:bodyPr/>
+          <a:p/>
+        </p:txBody>
       </p:sp>
       <p:sp>
         <p:nvSpPr>
@@ -15484,6 +15838,10 @@
             </a:solidFill>
           </a:ln>
         </p:spPr>
+        <p:txBody xmlns:a="http://schemas.openxmlformats.org/drawingml/2006/main">
+          <a:bodyPr/>
+          <a:p/>
+        </p:txBody>
       </p:sp>
       <p:sp>
         <p:nvSpPr>
@@ -15514,6 +15872,10 @@
             </a:solidFill>
           </a:ln>
         </p:spPr>
+        <p:txBody xmlns:a="http://schemas.openxmlformats.org/drawingml/2006/main">
+          <a:bodyPr/>
+          <a:p/>
+        </p:txBody>
       </p:sp>
       <p:sp>
         <p:nvSpPr>
@@ -15546,6 +15908,10 @@
             </a:solidFill>
           </a:ln>
         </p:spPr>
+        <p:txBody xmlns:a="http://schemas.openxmlformats.org/drawingml/2006/main">
+          <a:bodyPr/>
+          <a:p/>
+        </p:txBody>
       </p:sp>
       <p:sp>
         <p:nvSpPr>
@@ -15576,6 +15942,10 @@
             </a:solidFill>
           </a:ln>
         </p:spPr>
+        <p:txBody xmlns:a="http://schemas.openxmlformats.org/drawingml/2006/main">
+          <a:bodyPr/>
+          <a:p/>
+        </p:txBody>
       </p:sp>
       <p:sp>
         <p:nvSpPr>
@@ -15664,6 +16034,10 @@
             </a:solidFill>
           </a:ln>
         </p:spPr>
+        <p:txBody xmlns:a="http://schemas.openxmlformats.org/drawingml/2006/main">
+          <a:bodyPr/>
+          <a:p/>
+        </p:txBody>
       </p:sp>
       <p:sp>
         <p:nvSpPr>
@@ -15696,6 +16070,10 @@
             </a:solidFill>
           </a:ln>
         </p:spPr>
+        <p:txBody xmlns:a="http://schemas.openxmlformats.org/drawingml/2006/main">
+          <a:bodyPr/>
+          <a:p/>
+        </p:txBody>
       </p:sp>
       <p:sp>
         <p:nvSpPr>
@@ -15726,6 +16104,10 @@
             </a:solidFill>
           </a:ln>
         </p:spPr>
+        <p:txBody xmlns:a="http://schemas.openxmlformats.org/drawingml/2006/main">
+          <a:bodyPr/>
+          <a:p/>
+        </p:txBody>
       </p:sp>
       <p:sp>
         <p:nvSpPr>
@@ -15814,6 +16196,10 @@
             </a:solidFill>
           </a:ln>
         </p:spPr>
+        <p:txBody xmlns:a="http://schemas.openxmlformats.org/drawingml/2006/main">
+          <a:bodyPr/>
+          <a:p/>
+        </p:txBody>
       </p:sp>
       <p:sp>
         <p:nvSpPr>
@@ -15846,6 +16232,10 @@
             </a:solidFill>
           </a:ln>
         </p:spPr>
+        <p:txBody xmlns:a="http://schemas.openxmlformats.org/drawingml/2006/main">
+          <a:bodyPr/>
+          <a:p/>
+        </p:txBody>
       </p:sp>
       <p:sp>
         <p:nvSpPr>
@@ -15876,6 +16266,10 @@
             </a:solidFill>
           </a:ln>
         </p:spPr>
+        <p:txBody xmlns:a="http://schemas.openxmlformats.org/drawingml/2006/main">
+          <a:bodyPr/>
+          <a:p/>
+        </p:txBody>
       </p:sp>
       <p:sp>
         <p:nvSpPr>
@@ -15964,6 +16358,10 @@
             </a:solidFill>
           </a:ln>
         </p:spPr>
+        <p:txBody xmlns:a="http://schemas.openxmlformats.org/drawingml/2006/main">
+          <a:bodyPr/>
+          <a:p/>
+        </p:txBody>
       </p:sp>
       <p:sp>
         <p:nvSpPr>
@@ -15994,6 +16392,10 @@
             </a:solidFill>
           </a:ln>
         </p:spPr>
+        <p:txBody xmlns:a="http://schemas.openxmlformats.org/drawingml/2006/main">
+          <a:bodyPr/>
+          <a:p/>
+        </p:txBody>
       </p:sp>
       <p:sp>
         <p:nvSpPr>
@@ -16024,6 +16426,10 @@
             </a:solidFill>
           </a:ln>
         </p:spPr>
+        <p:txBody xmlns:a="http://schemas.openxmlformats.org/drawingml/2006/main">
+          <a:bodyPr/>
+          <a:p/>
+        </p:txBody>
       </p:sp>
       <p:sp>
         <p:nvSpPr>
@@ -16801,6 +17207,10 @@
             </a:solidFill>
           </a:ln>
         </p:spPr>
+        <p:txBody xmlns:a="http://schemas.openxmlformats.org/drawingml/2006/main">
+          <a:bodyPr/>
+          <a:p/>
+        </p:txBody>
       </p:sp>
       <p:sp>
         <p:nvSpPr>
@@ -16833,6 +17243,10 @@
             </a:solidFill>
           </a:ln>
         </p:spPr>
+        <p:txBody xmlns:a="http://schemas.openxmlformats.org/drawingml/2006/main">
+          <a:bodyPr/>
+          <a:p/>
+        </p:txBody>
       </p:sp>
       <p:sp>
         <p:nvSpPr>
@@ -16863,6 +17277,10 @@
             </a:solidFill>
           </a:ln>
         </p:spPr>
+        <p:txBody xmlns:a="http://schemas.openxmlformats.org/drawingml/2006/main">
+          <a:bodyPr/>
+          <a:p/>
+        </p:txBody>
       </p:sp>
       <p:sp>
         <p:nvSpPr>
@@ -17067,6 +17485,10 @@
             </a:solidFill>
           </a:ln>
         </p:spPr>
+        <p:txBody xmlns:a="http://schemas.openxmlformats.org/drawingml/2006/main">
+          <a:bodyPr/>
+          <a:p/>
+        </p:txBody>
       </p:sp>
       <p:sp>
         <p:nvSpPr>
@@ -17097,6 +17519,10 @@
             </a:solidFill>
           </a:ln>
         </p:spPr>
+        <p:txBody xmlns:a="http://schemas.openxmlformats.org/drawingml/2006/main">
+          <a:bodyPr/>
+          <a:p/>
+        </p:txBody>
       </p:sp>
       <p:sp>
         <p:nvSpPr>
@@ -17129,6 +17555,10 @@
             </a:solidFill>
           </a:ln>
         </p:spPr>
+        <p:txBody xmlns:a="http://schemas.openxmlformats.org/drawingml/2006/main">
+          <a:bodyPr/>
+          <a:p/>
+        </p:txBody>
       </p:sp>
       <p:sp>
         <p:nvSpPr>
@@ -17159,6 +17589,10 @@
             </a:solidFill>
           </a:ln>
         </p:spPr>
+        <p:txBody xmlns:a="http://schemas.openxmlformats.org/drawingml/2006/main">
+          <a:bodyPr/>
+          <a:p/>
+        </p:txBody>
       </p:sp>
       <p:sp>
         <p:nvSpPr>
@@ -17247,6 +17681,10 @@
             </a:solidFill>
           </a:ln>
         </p:spPr>
+        <p:txBody xmlns:a="http://schemas.openxmlformats.org/drawingml/2006/main">
+          <a:bodyPr/>
+          <a:p/>
+        </p:txBody>
       </p:sp>
       <p:sp>
         <p:nvSpPr>
@@ -17279,6 +17717,10 @@
             </a:solidFill>
           </a:ln>
         </p:spPr>
+        <p:txBody xmlns:a="http://schemas.openxmlformats.org/drawingml/2006/main">
+          <a:bodyPr/>
+          <a:p/>
+        </p:txBody>
       </p:sp>
       <p:sp>
         <p:nvSpPr>
@@ -17309,6 +17751,10 @@
             </a:solidFill>
           </a:ln>
         </p:spPr>
+        <p:txBody xmlns:a="http://schemas.openxmlformats.org/drawingml/2006/main">
+          <a:bodyPr/>
+          <a:p/>
+        </p:txBody>
       </p:sp>
       <p:sp>
         <p:nvSpPr>
@@ -17397,6 +17843,10 @@
             </a:solidFill>
           </a:ln>
         </p:spPr>
+        <p:txBody xmlns:a="http://schemas.openxmlformats.org/drawingml/2006/main">
+          <a:bodyPr/>
+          <a:p/>
+        </p:txBody>
       </p:sp>
       <p:sp>
         <p:nvSpPr>
@@ -17543,6 +17993,10 @@
             </a:solidFill>
           </a:ln>
         </p:spPr>
+        <p:txBody xmlns:a="http://schemas.openxmlformats.org/drawingml/2006/main">
+          <a:bodyPr/>
+          <a:p/>
+        </p:txBody>
       </p:sp>
       <p:sp>
         <p:nvSpPr>
@@ -17573,6 +18027,10 @@
             </a:solidFill>
           </a:ln>
         </p:spPr>
+        <p:txBody xmlns:a="http://schemas.openxmlformats.org/drawingml/2006/main">
+          <a:bodyPr/>
+          <a:p/>
+        </p:txBody>
       </p:sp>
       <p:sp>
         <p:nvSpPr>
@@ -17603,6 +18061,10 @@
             </a:solidFill>
           </a:ln>
         </p:spPr>
+        <p:txBody xmlns:a="http://schemas.openxmlformats.org/drawingml/2006/main">
+          <a:bodyPr/>
+          <a:p/>
+        </p:txBody>
       </p:sp>
       <p:sp>
         <p:nvSpPr>
@@ -19748,6 +20210,10 @@
             </a:solidFill>
           </a:ln>
         </p:spPr>
+        <p:txBody xmlns:a="http://schemas.openxmlformats.org/drawingml/2006/main">
+          <a:bodyPr/>
+          <a:p/>
+        </p:txBody>
       </p:sp>
       <p:sp>
         <p:nvSpPr>
@@ -19780,6 +20246,10 @@
             </a:solidFill>
           </a:ln>
         </p:spPr>
+        <p:txBody xmlns:a="http://schemas.openxmlformats.org/drawingml/2006/main">
+          <a:bodyPr/>
+          <a:p/>
+        </p:txBody>
       </p:sp>
       <p:sp>
         <p:nvSpPr>
@@ -19810,6 +20280,10 @@
             </a:solidFill>
           </a:ln>
         </p:spPr>
+        <p:txBody xmlns:a="http://schemas.openxmlformats.org/drawingml/2006/main">
+          <a:bodyPr/>
+          <a:p/>
+        </p:txBody>
       </p:sp>
       <p:sp>
         <p:nvSpPr>
@@ -20014,6 +20488,10 @@
             </a:solidFill>
           </a:ln>
         </p:spPr>
+        <p:txBody xmlns:a="http://schemas.openxmlformats.org/drawingml/2006/main">
+          <a:bodyPr/>
+          <a:p/>
+        </p:txBody>
       </p:sp>
       <p:sp>
         <p:nvSpPr>
@@ -20044,6 +20522,10 @@
             </a:solidFill>
           </a:ln>
         </p:spPr>
+        <p:txBody xmlns:a="http://schemas.openxmlformats.org/drawingml/2006/main">
+          <a:bodyPr/>
+          <a:p/>
+        </p:txBody>
       </p:sp>
       <p:sp>
         <p:nvSpPr>
@@ -20074,6 +20556,10 @@
             </a:solidFill>
           </a:ln>
         </p:spPr>
+        <p:txBody xmlns:a="http://schemas.openxmlformats.org/drawingml/2006/main">
+          <a:bodyPr/>
+          <a:p/>
+        </p:txBody>
       </p:sp>
       <p:sp>
         <p:nvSpPr>
@@ -20104,6 +20590,10 @@
             </a:solidFill>
           </a:ln>
         </p:spPr>
+        <p:txBody xmlns:a="http://schemas.openxmlformats.org/drawingml/2006/main">
+          <a:bodyPr/>
+          <a:p/>
+        </p:txBody>
       </p:sp>
       <p:sp>
         <p:nvSpPr>
@@ -20136,6 +20626,10 @@
             </a:solidFill>
           </a:ln>
         </p:spPr>
+        <p:txBody xmlns:a="http://schemas.openxmlformats.org/drawingml/2006/main">
+          <a:bodyPr/>
+          <a:p/>
+        </p:txBody>
       </p:sp>
       <p:sp>
         <p:nvSpPr>
@@ -20166,6 +20660,10 @@
             </a:solidFill>
           </a:ln>
         </p:spPr>
+        <p:txBody xmlns:a="http://schemas.openxmlformats.org/drawingml/2006/main">
+          <a:bodyPr/>
+          <a:p/>
+        </p:txBody>
       </p:sp>
       <p:sp>
         <p:nvSpPr>
@@ -20254,6 +20752,10 @@
             </a:solidFill>
           </a:ln>
         </p:spPr>
+        <p:txBody xmlns:a="http://schemas.openxmlformats.org/drawingml/2006/main">
+          <a:bodyPr/>
+          <a:p/>
+        </p:txBody>
       </p:sp>
       <p:sp>
         <p:nvSpPr>
@@ -20286,6 +20788,10 @@
             </a:solidFill>
           </a:ln>
         </p:spPr>
+        <p:txBody xmlns:a="http://schemas.openxmlformats.org/drawingml/2006/main">
+          <a:bodyPr/>
+          <a:p/>
+        </p:txBody>
       </p:sp>
       <p:sp>
         <p:nvSpPr>
@@ -20316,6 +20822,10 @@
             </a:solidFill>
           </a:ln>
         </p:spPr>
+        <p:txBody xmlns:a="http://schemas.openxmlformats.org/drawingml/2006/main">
+          <a:bodyPr/>
+          <a:p/>
+        </p:txBody>
       </p:sp>
       <p:sp>
         <p:nvSpPr>
@@ -20406,6 +20916,10 @@
             </a:solidFill>
           </a:ln>
         </p:spPr>
+        <p:txBody xmlns:a="http://schemas.openxmlformats.org/drawingml/2006/main">
+          <a:bodyPr/>
+          <a:p/>
+        </p:txBody>
       </p:sp>
       <p:sp>
         <p:nvSpPr>
@@ -20438,6 +20952,10 @@
             </a:solidFill>
           </a:ln>
         </p:spPr>
+        <p:txBody xmlns:a="http://schemas.openxmlformats.org/drawingml/2006/main">
+          <a:bodyPr/>
+          <a:p/>
+        </p:txBody>
       </p:sp>
       <p:sp>
         <p:nvSpPr>
@@ -20468,6 +20986,10 @@
             </a:solidFill>
           </a:ln>
         </p:spPr>
+        <p:txBody xmlns:a="http://schemas.openxmlformats.org/drawingml/2006/main">
+          <a:bodyPr/>
+          <a:p/>
+        </p:txBody>
       </p:sp>
       <p:sp>
         <p:nvSpPr>
@@ -20498,6 +21020,10 @@
             </a:solidFill>
           </a:ln>
         </p:spPr>
+        <p:txBody xmlns:a="http://schemas.openxmlformats.org/drawingml/2006/main">
+          <a:bodyPr/>
+          <a:p/>
+        </p:txBody>
       </p:sp>
       <p:sp>
         <p:nvSpPr>
@@ -20528,6 +21054,10 @@
             </a:solidFill>
           </a:ln>
         </p:spPr>
+        <p:txBody xmlns:a="http://schemas.openxmlformats.org/drawingml/2006/main">
+          <a:bodyPr/>
+          <a:p/>
+        </p:txBody>
       </p:sp>
       <p:sp>
         <p:nvSpPr>
@@ -20616,6 +21146,10 @@
             </a:solidFill>
           </a:ln>
         </p:spPr>
+        <p:txBody xmlns:a="http://schemas.openxmlformats.org/drawingml/2006/main">
+          <a:bodyPr/>
+          <a:p/>
+        </p:txBody>
       </p:sp>
       <p:sp>
         <p:nvSpPr>
@@ -20646,6 +21180,10 @@
             </a:solidFill>
           </a:ln>
         </p:spPr>
+        <p:txBody xmlns:a="http://schemas.openxmlformats.org/drawingml/2006/main">
+          <a:bodyPr/>
+          <a:p/>
+        </p:txBody>
       </p:sp>
       <p:sp>
         <p:nvSpPr>
@@ -20676,6 +21214,10 @@
             </a:solidFill>
           </a:ln>
         </p:spPr>
+        <p:txBody xmlns:a="http://schemas.openxmlformats.org/drawingml/2006/main">
+          <a:bodyPr/>
+          <a:p/>
+        </p:txBody>
       </p:sp>
       <p:sp>
         <p:nvSpPr>
@@ -20764,6 +21306,10 @@
             </a:solidFill>
           </a:ln>
         </p:spPr>
+        <p:txBody xmlns:a="http://schemas.openxmlformats.org/drawingml/2006/main">
+          <a:bodyPr/>
+          <a:p/>
+        </p:txBody>
       </p:sp>
       <p:sp>
         <p:nvSpPr>
@@ -20794,6 +21340,10 @@
             </a:solidFill>
           </a:ln>
         </p:spPr>
+        <p:txBody xmlns:a="http://schemas.openxmlformats.org/drawingml/2006/main">
+          <a:bodyPr/>
+          <a:p/>
+        </p:txBody>
       </p:sp>
       <p:sp>
         <p:nvSpPr>
@@ -20824,6 +21374,10 @@
             </a:solidFill>
           </a:ln>
         </p:spPr>
+        <p:txBody xmlns:a="http://schemas.openxmlformats.org/drawingml/2006/main">
+          <a:bodyPr/>
+          <a:p/>
+        </p:txBody>
       </p:sp>
       <p:sp>
         <p:nvSpPr>
@@ -21601,6 +22155,10 @@
             </a:solidFill>
           </a:ln>
         </p:spPr>
+        <p:txBody xmlns:a="http://schemas.openxmlformats.org/drawingml/2006/main">
+          <a:bodyPr/>
+          <a:p/>
+        </p:txBody>
       </p:sp>
       <p:sp>
         <p:nvSpPr>
@@ -21633,6 +22191,10 @@
             </a:solidFill>
           </a:ln>
         </p:spPr>
+        <p:txBody xmlns:a="http://schemas.openxmlformats.org/drawingml/2006/main">
+          <a:bodyPr/>
+          <a:p/>
+        </p:txBody>
       </p:sp>
       <p:sp>
         <p:nvSpPr>
@@ -21663,6 +22225,10 @@
             </a:solidFill>
           </a:ln>
         </p:spPr>
+        <p:txBody xmlns:a="http://schemas.openxmlformats.org/drawingml/2006/main">
+          <a:bodyPr/>
+          <a:p/>
+        </p:txBody>
       </p:sp>
       <p:sp>
         <p:nvSpPr>
@@ -21867,6 +22433,10 @@
             </a:solidFill>
           </a:ln>
         </p:spPr>
+        <p:txBody xmlns:a="http://schemas.openxmlformats.org/drawingml/2006/main">
+          <a:bodyPr/>
+          <a:p/>
+        </p:txBody>
       </p:sp>
       <p:sp>
         <p:nvSpPr>
@@ -21899,6 +22469,10 @@
             </a:solidFill>
           </a:ln>
         </p:spPr>
+        <p:txBody xmlns:a="http://schemas.openxmlformats.org/drawingml/2006/main">
+          <a:bodyPr/>
+          <a:p/>
+        </p:txBody>
       </p:sp>
       <p:sp>
         <p:nvSpPr>
@@ -21929,6 +22503,10 @@
             </a:solidFill>
           </a:ln>
         </p:spPr>
+        <p:txBody xmlns:a="http://schemas.openxmlformats.org/drawingml/2006/main">
+          <a:bodyPr/>
+          <a:p/>
+        </p:txBody>
       </p:sp>
       <p:sp>
         <p:nvSpPr>
@@ -22017,6 +22595,10 @@
             </a:solidFill>
           </a:ln>
         </p:spPr>
+        <p:txBody xmlns:a="http://schemas.openxmlformats.org/drawingml/2006/main">
+          <a:bodyPr/>
+          <a:p/>
+        </p:txBody>
       </p:sp>
       <p:sp>
         <p:nvSpPr>
@@ -22047,6 +22629,10 @@
             </a:solidFill>
           </a:ln>
         </p:spPr>
+        <p:txBody xmlns:a="http://schemas.openxmlformats.org/drawingml/2006/main">
+          <a:bodyPr/>
+          <a:p/>
+        </p:txBody>
       </p:sp>
       <p:sp>
         <p:nvSpPr>
@@ -22077,6 +22663,10 @@
             </a:solidFill>
           </a:ln>
         </p:spPr>
+        <p:txBody xmlns:a="http://schemas.openxmlformats.org/drawingml/2006/main">
+          <a:bodyPr/>
+          <a:p/>
+        </p:txBody>
       </p:sp>
       <p:sp>
         <p:nvSpPr>
@@ -22109,6 +22699,10 @@
             </a:solidFill>
           </a:ln>
         </p:spPr>
+        <p:txBody xmlns:a="http://schemas.openxmlformats.org/drawingml/2006/main">
+          <a:bodyPr/>
+          <a:p/>
+        </p:txBody>
       </p:sp>
       <p:sp>
         <p:nvSpPr>
@@ -22139,6 +22733,10 @@
             </a:solidFill>
           </a:ln>
         </p:spPr>
+        <p:txBody xmlns:a="http://schemas.openxmlformats.org/drawingml/2006/main">
+          <a:bodyPr/>
+          <a:p/>
+        </p:txBody>
       </p:sp>
       <p:sp>
         <p:nvSpPr>
@@ -22227,6 +22825,10 @@
             </a:solidFill>
           </a:ln>
         </p:spPr>
+        <p:txBody xmlns:a="http://schemas.openxmlformats.org/drawingml/2006/main">
+          <a:bodyPr/>
+          <a:p/>
+        </p:txBody>
       </p:sp>
       <p:sp>
         <p:nvSpPr>
@@ -22259,6 +22861,10 @@
             </a:solidFill>
           </a:ln>
         </p:spPr>
+        <p:txBody xmlns:a="http://schemas.openxmlformats.org/drawingml/2006/main">
+          <a:bodyPr/>
+          <a:p/>
+        </p:txBody>
       </p:sp>
       <p:sp>
         <p:nvSpPr>
@@ -22289,6 +22895,10 @@
             </a:solidFill>
           </a:ln>
         </p:spPr>
+        <p:txBody xmlns:a="http://schemas.openxmlformats.org/drawingml/2006/main">
+          <a:bodyPr/>
+          <a:p/>
+        </p:txBody>
       </p:sp>
       <p:sp>
         <p:nvSpPr>
@@ -22379,6 +22989,10 @@
             </a:solidFill>
           </a:ln>
         </p:spPr>
+        <p:txBody xmlns:a="http://schemas.openxmlformats.org/drawingml/2006/main">
+          <a:bodyPr/>
+          <a:p/>
+        </p:txBody>
       </p:sp>
       <p:sp>
         <p:nvSpPr>
@@ -22411,6 +23025,10 @@
             </a:solidFill>
           </a:ln>
         </p:spPr>
+        <p:txBody xmlns:a="http://schemas.openxmlformats.org/drawingml/2006/main">
+          <a:bodyPr/>
+          <a:p/>
+        </p:txBody>
       </p:sp>
       <p:sp>
         <p:nvSpPr>
@@ -22441,6 +23059,10 @@
             </a:solidFill>
           </a:ln>
         </p:spPr>
+        <p:txBody xmlns:a="http://schemas.openxmlformats.org/drawingml/2006/main">
+          <a:bodyPr/>
+          <a:p/>
+        </p:txBody>
       </p:sp>
       <p:sp>
         <p:nvSpPr>
@@ -22471,6 +23093,10 @@
             </a:solidFill>
           </a:ln>
         </p:spPr>
+        <p:txBody xmlns:a="http://schemas.openxmlformats.org/drawingml/2006/main">
+          <a:bodyPr/>
+          <a:p/>
+        </p:txBody>
       </p:sp>
       <p:sp>
         <p:nvSpPr>
@@ -22501,6 +23127,10 @@
             </a:solidFill>
           </a:ln>
         </p:spPr>
+        <p:txBody xmlns:a="http://schemas.openxmlformats.org/drawingml/2006/main">
+          <a:bodyPr/>
+          <a:p/>
+        </p:txBody>
       </p:sp>
       <p:sp>
         <p:nvSpPr>
@@ -22589,6 +23219,10 @@
             </a:solidFill>
           </a:ln>
         </p:spPr>
+        <p:txBody xmlns:a="http://schemas.openxmlformats.org/drawingml/2006/main">
+          <a:bodyPr/>
+          <a:p/>
+        </p:txBody>
       </p:sp>
       <p:sp>
         <p:nvSpPr>
@@ -22619,6 +23253,10 @@
             </a:solidFill>
           </a:ln>
         </p:spPr>
+        <p:txBody xmlns:a="http://schemas.openxmlformats.org/drawingml/2006/main">
+          <a:bodyPr/>
+          <a:p/>
+        </p:txBody>
       </p:sp>
       <p:sp>
         <p:nvSpPr>
@@ -22649,6 +23287,10 @@
             </a:solidFill>
           </a:ln>
         </p:spPr>
+        <p:txBody xmlns:a="http://schemas.openxmlformats.org/drawingml/2006/main">
+          <a:bodyPr/>
+          <a:p/>
+        </p:txBody>
       </p:sp>
       <p:sp>
         <p:nvSpPr>
@@ -22737,6 +23379,10 @@
             </a:solidFill>
           </a:ln>
         </p:spPr>
+        <p:txBody xmlns:a="http://schemas.openxmlformats.org/drawingml/2006/main">
+          <a:bodyPr/>
+          <a:p/>
+        </p:txBody>
       </p:sp>
       <p:sp>
         <p:nvSpPr>
@@ -22767,6 +23413,10 @@
             </a:solidFill>
           </a:ln>
         </p:spPr>
+        <p:txBody xmlns:a="http://schemas.openxmlformats.org/drawingml/2006/main">
+          <a:bodyPr/>
+          <a:p/>
+        </p:txBody>
       </p:sp>
       <p:sp>
         <p:nvSpPr>
@@ -22797,6 +23447,10 @@
             </a:solidFill>
           </a:ln>
         </p:spPr>
+        <p:txBody xmlns:a="http://schemas.openxmlformats.org/drawingml/2006/main">
+          <a:bodyPr/>
+          <a:p/>
+        </p:txBody>
       </p:sp>
       <p:sp>
         <p:nvSpPr>
@@ -23574,6 +24228,10 @@
             </a:solidFill>
           </a:ln>
         </p:spPr>
+        <p:txBody xmlns:a="http://schemas.openxmlformats.org/drawingml/2006/main">
+          <a:bodyPr/>
+          <a:p/>
+        </p:txBody>
       </p:sp>
       <p:sp>
         <p:nvSpPr>
@@ -23606,6 +24264,10 @@
             </a:solidFill>
           </a:ln>
         </p:spPr>
+        <p:txBody xmlns:a="http://schemas.openxmlformats.org/drawingml/2006/main">
+          <a:bodyPr/>
+          <a:p/>
+        </p:txBody>
       </p:sp>
       <p:sp>
         <p:nvSpPr>
@@ -23636,6 +24298,10 @@
             </a:solidFill>
           </a:ln>
         </p:spPr>
+        <p:txBody xmlns:a="http://schemas.openxmlformats.org/drawingml/2006/main">
+          <a:bodyPr/>
+          <a:p/>
+        </p:txBody>
       </p:sp>
       <p:sp>
         <p:nvSpPr>
@@ -23840,6 +24506,10 @@
             </a:solidFill>
           </a:ln>
         </p:spPr>
+        <p:txBody xmlns:a="http://schemas.openxmlformats.org/drawingml/2006/main">
+          <a:bodyPr/>
+          <a:p/>
+        </p:txBody>
       </p:sp>
       <p:sp>
         <p:nvSpPr>
@@ -23872,6 +24542,10 @@
             </a:solidFill>
           </a:ln>
         </p:spPr>
+        <p:txBody xmlns:a="http://schemas.openxmlformats.org/drawingml/2006/main">
+          <a:bodyPr/>
+          <a:p/>
+        </p:txBody>
       </p:sp>
       <p:sp>
         <p:nvSpPr>
@@ -23902,6 +24576,10 @@
             </a:solidFill>
           </a:ln>
         </p:spPr>
+        <p:txBody xmlns:a="http://schemas.openxmlformats.org/drawingml/2006/main">
+          <a:bodyPr/>
+          <a:p/>
+        </p:txBody>
       </p:sp>
       <p:sp>
         <p:nvSpPr>
@@ -24106,6 +24784,10 @@
             </a:solidFill>
           </a:ln>
         </p:spPr>
+        <p:txBody xmlns:a="http://schemas.openxmlformats.org/drawingml/2006/main">
+          <a:bodyPr/>
+          <a:p/>
+        </p:txBody>
       </p:sp>
       <p:sp>
         <p:nvSpPr>
@@ -24138,6 +24820,10 @@
             </a:solidFill>
           </a:ln>
         </p:spPr>
+        <p:txBody xmlns:a="http://schemas.openxmlformats.org/drawingml/2006/main">
+          <a:bodyPr/>
+          <a:p/>
+        </p:txBody>
       </p:sp>
       <p:sp>
         <p:nvSpPr>
@@ -24168,6 +24854,10 @@
             </a:solidFill>
           </a:ln>
         </p:spPr>
+        <p:txBody xmlns:a="http://schemas.openxmlformats.org/drawingml/2006/main">
+          <a:bodyPr/>
+          <a:p/>
+        </p:txBody>
       </p:sp>
       <p:sp>
         <p:nvSpPr>
@@ -24256,6 +24946,10 @@
             </a:solidFill>
           </a:ln>
         </p:spPr>
+        <p:txBody xmlns:a="http://schemas.openxmlformats.org/drawingml/2006/main">
+          <a:bodyPr/>
+          <a:p/>
+        </p:txBody>
       </p:sp>
       <p:sp>
         <p:nvSpPr>
@@ -24288,6 +24982,10 @@
             </a:solidFill>
           </a:ln>
         </p:spPr>
+        <p:txBody xmlns:a="http://schemas.openxmlformats.org/drawingml/2006/main">
+          <a:bodyPr/>
+          <a:p/>
+        </p:txBody>
       </p:sp>
       <p:sp>
         <p:nvSpPr>
@@ -24318,6 +25016,10 @@
             </a:solidFill>
           </a:ln>
         </p:spPr>
+        <p:txBody xmlns:a="http://schemas.openxmlformats.org/drawingml/2006/main">
+          <a:bodyPr/>
+          <a:p/>
+        </p:txBody>
       </p:sp>
       <p:sp>
         <p:nvSpPr>
@@ -24406,6 +25108,10 @@
             </a:solidFill>
           </a:ln>
         </p:spPr>
+        <p:txBody xmlns:a="http://schemas.openxmlformats.org/drawingml/2006/main">
+          <a:bodyPr/>
+          <a:p/>
+        </p:txBody>
       </p:sp>
       <p:sp>
         <p:nvSpPr>
@@ -24436,6 +25142,10 @@
             </a:solidFill>
           </a:ln>
         </p:spPr>
+        <p:txBody xmlns:a="http://schemas.openxmlformats.org/drawingml/2006/main">
+          <a:bodyPr/>
+          <a:p/>
+        </p:txBody>
       </p:sp>
       <p:sp>
         <p:nvSpPr>
@@ -24466,6 +25176,10 @@
             </a:solidFill>
           </a:ln>
         </p:spPr>
+        <p:txBody xmlns:a="http://schemas.openxmlformats.org/drawingml/2006/main">
+          <a:bodyPr/>
+          <a:p/>
+        </p:txBody>
       </p:sp>
       <p:sp>
         <p:nvSpPr>
@@ -24496,6 +25210,10 @@
             </a:solidFill>
           </a:ln>
         </p:spPr>
+        <p:txBody xmlns:a="http://schemas.openxmlformats.org/drawingml/2006/main">
+          <a:bodyPr/>
+          <a:p/>
+        </p:txBody>
       </p:sp>
       <p:sp>
         <p:nvSpPr>
@@ -25297,6 +26015,10 @@
             </a:solidFill>
           </a:ln>
         </p:spPr>
+        <p:txBody xmlns:a="http://schemas.openxmlformats.org/drawingml/2006/main">
+          <a:bodyPr/>
+          <a:p/>
+        </p:txBody>
       </p:sp>
       <p:sp>
         <p:nvSpPr>
@@ -25329,6 +26051,10 @@
             </a:solidFill>
           </a:ln>
         </p:spPr>
+        <p:txBody xmlns:a="http://schemas.openxmlformats.org/drawingml/2006/main">
+          <a:bodyPr/>
+          <a:p/>
+        </p:txBody>
       </p:sp>
       <p:sp>
         <p:nvSpPr>
@@ -25359,6 +26085,10 @@
             </a:solidFill>
           </a:ln>
         </p:spPr>
+        <p:txBody xmlns:a="http://schemas.openxmlformats.org/drawingml/2006/main">
+          <a:bodyPr/>
+          <a:p/>
+        </p:txBody>
       </p:sp>
       <p:sp>
         <p:nvSpPr>
@@ -25563,6 +26293,10 @@
             </a:solidFill>
           </a:ln>
         </p:spPr>
+        <p:txBody xmlns:a="http://schemas.openxmlformats.org/drawingml/2006/main">
+          <a:bodyPr/>
+          <a:p/>
+        </p:txBody>
       </p:sp>
       <p:sp>
         <p:nvSpPr>
@@ -25595,6 +26329,10 @@
             </a:solidFill>
           </a:ln>
         </p:spPr>
+        <p:txBody xmlns:a="http://schemas.openxmlformats.org/drawingml/2006/main">
+          <a:bodyPr/>
+          <a:p/>
+        </p:txBody>
       </p:sp>
       <p:sp>
         <p:nvSpPr>
@@ -25625,6 +26363,10 @@
             </a:solidFill>
           </a:ln>
         </p:spPr>
+        <p:txBody xmlns:a="http://schemas.openxmlformats.org/drawingml/2006/main">
+          <a:bodyPr/>
+          <a:p/>
+        </p:txBody>
       </p:sp>
       <p:sp>
         <p:nvSpPr>
@@ -25829,6 +26571,10 @@
             </a:solidFill>
           </a:ln>
         </p:spPr>
+        <p:txBody xmlns:a="http://schemas.openxmlformats.org/drawingml/2006/main">
+          <a:bodyPr/>
+          <a:p/>
+        </p:txBody>
       </p:sp>
       <p:sp>
         <p:nvSpPr>
@@ -25861,6 +26607,10 @@
             </a:solidFill>
           </a:ln>
         </p:spPr>
+        <p:txBody xmlns:a="http://schemas.openxmlformats.org/drawingml/2006/main">
+          <a:bodyPr/>
+          <a:p/>
+        </p:txBody>
       </p:sp>
       <p:sp>
         <p:nvSpPr>
@@ -25891,6 +26641,10 @@
             </a:solidFill>
           </a:ln>
         </p:spPr>
+        <p:txBody xmlns:a="http://schemas.openxmlformats.org/drawingml/2006/main">
+          <a:bodyPr/>
+          <a:p/>
+        </p:txBody>
       </p:sp>
       <p:sp>
         <p:nvSpPr>
@@ -25979,6 +26733,10 @@
             </a:solidFill>
           </a:ln>
         </p:spPr>
+        <p:txBody xmlns:a="http://schemas.openxmlformats.org/drawingml/2006/main">
+          <a:bodyPr/>
+          <a:p/>
+        </p:txBody>
       </p:sp>
       <p:sp>
         <p:nvSpPr>
@@ -26011,6 +26769,10 @@
             </a:solidFill>
           </a:ln>
         </p:spPr>
+        <p:txBody xmlns:a="http://schemas.openxmlformats.org/drawingml/2006/main">
+          <a:bodyPr/>
+          <a:p/>
+        </p:txBody>
       </p:sp>
       <p:sp>
         <p:nvSpPr>
@@ -26041,6 +26803,10 @@
             </a:solidFill>
           </a:ln>
         </p:spPr>
+        <p:txBody xmlns:a="http://schemas.openxmlformats.org/drawingml/2006/main">
+          <a:bodyPr/>
+          <a:p/>
+        </p:txBody>
       </p:sp>
       <p:sp>
         <p:nvSpPr>
@@ -26129,6 +26895,10 @@
             </a:solidFill>
           </a:ln>
         </p:spPr>
+        <p:txBody xmlns:a="http://schemas.openxmlformats.org/drawingml/2006/main">
+          <a:bodyPr/>
+          <a:p/>
+        </p:txBody>
       </p:sp>
       <p:sp>
         <p:nvSpPr>
@@ -26161,6 +26931,10 @@
             </a:solidFill>
           </a:ln>
         </p:spPr>
+        <p:txBody xmlns:a="http://schemas.openxmlformats.org/drawingml/2006/main">
+          <a:bodyPr/>
+          <a:p/>
+        </p:txBody>
       </p:sp>
       <p:sp>
         <p:nvSpPr>
@@ -26191,6 +26965,10 @@
             </a:solidFill>
           </a:ln>
         </p:spPr>
+        <p:txBody xmlns:a="http://schemas.openxmlformats.org/drawingml/2006/main">
+          <a:bodyPr/>
+          <a:p/>
+        </p:txBody>
       </p:sp>
       <p:sp>
         <p:nvSpPr>
@@ -26318,6 +27096,10 @@
             </a:solidFill>
           </a:ln>
         </p:spPr>
+        <p:txBody xmlns:a="http://schemas.openxmlformats.org/drawingml/2006/main">
+          <a:bodyPr/>
+          <a:p/>
+        </p:txBody>
       </p:sp>
       <p:sp>
         <p:nvSpPr>
@@ -26350,6 +27132,10 @@
             </a:solidFill>
           </a:ln>
         </p:spPr>
+        <p:txBody xmlns:a="http://schemas.openxmlformats.org/drawingml/2006/main">
+          <a:bodyPr/>
+          <a:p/>
+        </p:txBody>
       </p:sp>
       <p:sp>
         <p:nvSpPr>
@@ -26382,6 +27168,10 @@
             </a:solidFill>
           </a:ln>
         </p:spPr>
+        <p:txBody xmlns:a="http://schemas.openxmlformats.org/drawingml/2006/main">
+          <a:bodyPr/>
+          <a:p/>
+        </p:txBody>
       </p:sp>
       <p:sp>
         <p:nvSpPr>
@@ -26528,6 +27318,10 @@
             </a:solidFill>
           </a:ln>
         </p:spPr>
+        <p:txBody xmlns:a="http://schemas.openxmlformats.org/drawingml/2006/main">
+          <a:bodyPr/>
+          <a:p/>
+        </p:txBody>
       </p:sp>
       <p:sp>
         <p:nvSpPr>
@@ -26558,6 +27352,10 @@
             </a:solidFill>
           </a:ln>
         </p:spPr>
+        <p:txBody xmlns:a="http://schemas.openxmlformats.org/drawingml/2006/main">
+          <a:bodyPr/>
+          <a:p/>
+        </p:txBody>
       </p:sp>
       <p:sp>
         <p:nvSpPr>
@@ -26588,6 +27386,10 @@
             </a:solidFill>
           </a:ln>
         </p:spPr>
+        <p:txBody xmlns:a="http://schemas.openxmlformats.org/drawingml/2006/main">
+          <a:bodyPr/>
+          <a:p/>
+        </p:txBody>
       </p:sp>
       <p:sp>
         <p:nvSpPr>
@@ -26676,6 +27478,10 @@
             </a:solidFill>
           </a:ln>
         </p:spPr>
+        <p:txBody xmlns:a="http://schemas.openxmlformats.org/drawingml/2006/main">
+          <a:bodyPr/>
+          <a:p/>
+        </p:txBody>
       </p:sp>
       <p:sp>
         <p:nvSpPr>
@@ -26706,6 +27512,10 @@
             </a:solidFill>
           </a:ln>
         </p:spPr>
+        <p:txBody xmlns:a="http://schemas.openxmlformats.org/drawingml/2006/main">
+          <a:bodyPr/>
+          <a:p/>
+        </p:txBody>
       </p:sp>
       <p:sp>
         <p:nvSpPr>
@@ -26736,6 +27546,10 @@
             </a:solidFill>
           </a:ln>
         </p:spPr>
+        <p:txBody xmlns:a="http://schemas.openxmlformats.org/drawingml/2006/main">
+          <a:bodyPr/>
+          <a:p/>
+        </p:txBody>
       </p:sp>
       <p:sp>
         <p:nvSpPr>
@@ -26824,6 +27638,10 @@
             </a:solidFill>
           </a:ln>
         </p:spPr>
+        <p:txBody xmlns:a="http://schemas.openxmlformats.org/drawingml/2006/main">
+          <a:bodyPr/>
+          <a:p/>
+        </p:txBody>
       </p:sp>
       <p:sp>
         <p:nvSpPr>
@@ -26854,6 +27672,10 @@
             </a:solidFill>
           </a:ln>
         </p:spPr>
+        <p:txBody xmlns:a="http://schemas.openxmlformats.org/drawingml/2006/main">
+          <a:bodyPr/>
+          <a:p/>
+        </p:txBody>
       </p:sp>
       <p:sp>
         <p:nvSpPr>
@@ -26884,6 +27706,10 @@
             </a:solidFill>
           </a:ln>
         </p:spPr>
+        <p:txBody xmlns:a="http://schemas.openxmlformats.org/drawingml/2006/main">
+          <a:bodyPr/>
+          <a:p/>
+        </p:txBody>
       </p:sp>
       <p:sp>
         <p:nvSpPr>
@@ -28115,6 +28941,10 @@
             </a:solidFill>
           </a:ln>
         </p:spPr>
+        <p:txBody xmlns:a="http://schemas.openxmlformats.org/drawingml/2006/main">
+          <a:bodyPr/>
+          <a:p/>
+        </p:txBody>
       </p:sp>
       <p:sp>
         <p:nvSpPr>
@@ -28147,6 +28977,10 @@
             </a:solidFill>
           </a:ln>
         </p:spPr>
+        <p:txBody xmlns:a="http://schemas.openxmlformats.org/drawingml/2006/main">
+          <a:bodyPr/>
+          <a:p/>
+        </p:txBody>
       </p:sp>
       <p:sp>
         <p:nvSpPr>
@@ -28177,6 +29011,10 @@
             </a:solidFill>
           </a:ln>
         </p:spPr>
+        <p:txBody xmlns:a="http://schemas.openxmlformats.org/drawingml/2006/main">
+          <a:bodyPr/>
+          <a:p/>
+        </p:txBody>
       </p:sp>
       <p:sp>
         <p:nvSpPr>
@@ -28381,6 +29219,10 @@
             </a:solidFill>
           </a:ln>
         </p:spPr>
+        <p:txBody xmlns:a="http://schemas.openxmlformats.org/drawingml/2006/main">
+          <a:bodyPr/>
+          <a:p/>
+        </p:txBody>
       </p:sp>
       <p:sp>
         <p:nvSpPr>
@@ -28413,6 +29255,10 @@
             </a:solidFill>
           </a:ln>
         </p:spPr>
+        <p:txBody xmlns:a="http://schemas.openxmlformats.org/drawingml/2006/main">
+          <a:bodyPr/>
+          <a:p/>
+        </p:txBody>
       </p:sp>
       <p:sp>
         <p:nvSpPr>
@@ -28443,6 +29289,10 @@
             </a:solidFill>
           </a:ln>
         </p:spPr>
+        <p:txBody xmlns:a="http://schemas.openxmlformats.org/drawingml/2006/main">
+          <a:bodyPr/>
+          <a:p/>
+        </p:txBody>
       </p:sp>
       <p:sp>
         <p:nvSpPr>
@@ -28647,6 +29497,10 @@
             </a:solidFill>
           </a:ln>
         </p:spPr>
+        <p:txBody xmlns:a="http://schemas.openxmlformats.org/drawingml/2006/main">
+          <a:bodyPr/>
+          <a:p/>
+        </p:txBody>
       </p:sp>
       <p:sp>
         <p:nvSpPr>
@@ -28679,6 +29533,10 @@
             </a:solidFill>
           </a:ln>
         </p:spPr>
+        <p:txBody xmlns:a="http://schemas.openxmlformats.org/drawingml/2006/main">
+          <a:bodyPr/>
+          <a:p/>
+        </p:txBody>
       </p:sp>
       <p:sp>
         <p:nvSpPr>
@@ -28709,6 +29567,10 @@
             </a:solidFill>
           </a:ln>
         </p:spPr>
+        <p:txBody xmlns:a="http://schemas.openxmlformats.org/drawingml/2006/main">
+          <a:bodyPr/>
+          <a:p/>
+        </p:txBody>
       </p:sp>
       <p:sp>
         <p:nvSpPr>
@@ -28797,6 +29659,10 @@
             </a:solidFill>
           </a:ln>
         </p:spPr>
+        <p:txBody xmlns:a="http://schemas.openxmlformats.org/drawingml/2006/main">
+          <a:bodyPr/>
+          <a:p/>
+        </p:txBody>
       </p:sp>
       <p:sp>
         <p:nvSpPr>
@@ -28829,6 +29695,10 @@
             </a:solidFill>
           </a:ln>
         </p:spPr>
+        <p:txBody xmlns:a="http://schemas.openxmlformats.org/drawingml/2006/main">
+          <a:bodyPr/>
+          <a:p/>
+        </p:txBody>
       </p:sp>
       <p:sp>
         <p:nvSpPr>
@@ -28859,6 +29729,10 @@
             </a:solidFill>
           </a:ln>
         </p:spPr>
+        <p:txBody xmlns:a="http://schemas.openxmlformats.org/drawingml/2006/main">
+          <a:bodyPr/>
+          <a:p/>
+        </p:txBody>
       </p:sp>
       <p:sp>
         <p:nvSpPr>
@@ -28947,6 +29821,10 @@
             </a:solidFill>
           </a:ln>
         </p:spPr>
+        <p:txBody xmlns:a="http://schemas.openxmlformats.org/drawingml/2006/main">
+          <a:bodyPr/>
+          <a:p/>
+        </p:txBody>
       </p:sp>
       <p:sp>
         <p:nvSpPr>
@@ -28979,6 +29857,10 @@
             </a:solidFill>
           </a:ln>
         </p:spPr>
+        <p:txBody xmlns:a="http://schemas.openxmlformats.org/drawingml/2006/main">
+          <a:bodyPr/>
+          <a:p/>
+        </p:txBody>
       </p:sp>
       <p:sp>
         <p:nvSpPr>
@@ -29009,6 +29891,10 @@
             </a:solidFill>
           </a:ln>
         </p:spPr>
+        <p:txBody xmlns:a="http://schemas.openxmlformats.org/drawingml/2006/main">
+          <a:bodyPr/>
+          <a:p/>
+        </p:txBody>
       </p:sp>
       <p:sp>
         <p:nvSpPr>
@@ -29136,6 +30022,10 @@
             </a:solidFill>
           </a:ln>
         </p:spPr>
+        <p:txBody xmlns:a="http://schemas.openxmlformats.org/drawingml/2006/main">
+          <a:bodyPr/>
+          <a:p/>
+        </p:txBody>
       </p:sp>
       <p:sp>
         <p:nvSpPr>
@@ -29168,6 +30058,10 @@
             </a:solidFill>
           </a:ln>
         </p:spPr>
+        <p:txBody xmlns:a="http://schemas.openxmlformats.org/drawingml/2006/main">
+          <a:bodyPr/>
+          <a:p/>
+        </p:txBody>
       </p:sp>
       <p:sp>
         <p:nvSpPr>
@@ -29200,6 +30094,10 @@
             </a:solidFill>
           </a:ln>
         </p:spPr>
+        <p:txBody xmlns:a="http://schemas.openxmlformats.org/drawingml/2006/main">
+          <a:bodyPr/>
+          <a:p/>
+        </p:txBody>
       </p:sp>
       <p:sp>
         <p:nvSpPr>
@@ -29346,6 +30244,10 @@
             </a:solidFill>
           </a:ln>
         </p:spPr>
+        <p:txBody xmlns:a="http://schemas.openxmlformats.org/drawingml/2006/main">
+          <a:bodyPr/>
+          <a:p/>
+        </p:txBody>
       </p:sp>
       <p:sp>
         <p:nvSpPr>
@@ -29376,6 +30278,10 @@
             </a:solidFill>
           </a:ln>
         </p:spPr>
+        <p:txBody xmlns:a="http://schemas.openxmlformats.org/drawingml/2006/main">
+          <a:bodyPr/>
+          <a:p/>
+        </p:txBody>
       </p:sp>
       <p:sp>
         <p:nvSpPr>
@@ -29406,6 +30312,10 @@
             </a:solidFill>
           </a:ln>
         </p:spPr>
+        <p:txBody xmlns:a="http://schemas.openxmlformats.org/drawingml/2006/main">
+          <a:bodyPr/>
+          <a:p/>
+        </p:txBody>
       </p:sp>
       <p:sp>
         <p:nvSpPr>
@@ -29494,6 +30404,10 @@
             </a:solidFill>
           </a:ln>
         </p:spPr>
+        <p:txBody xmlns:a="http://schemas.openxmlformats.org/drawingml/2006/main">
+          <a:bodyPr/>
+          <a:p/>
+        </p:txBody>
       </p:sp>
       <p:sp>
         <p:nvSpPr>
@@ -29524,6 +30438,10 @@
             </a:solidFill>
           </a:ln>
         </p:spPr>
+        <p:txBody xmlns:a="http://schemas.openxmlformats.org/drawingml/2006/main">
+          <a:bodyPr/>
+          <a:p/>
+        </p:txBody>
       </p:sp>
       <p:sp>
         <p:nvSpPr>
@@ -29554,6 +30472,10 @@
             </a:solidFill>
           </a:ln>
         </p:spPr>
+        <p:txBody xmlns:a="http://schemas.openxmlformats.org/drawingml/2006/main">
+          <a:bodyPr/>
+          <a:p/>
+        </p:txBody>
       </p:sp>
       <p:sp>
         <p:nvSpPr>
@@ -29642,6 +30564,10 @@
             </a:solidFill>
           </a:ln>
         </p:spPr>
+        <p:txBody xmlns:a="http://schemas.openxmlformats.org/drawingml/2006/main">
+          <a:bodyPr/>
+          <a:p/>
+        </p:txBody>
       </p:sp>
       <p:sp>
         <p:nvSpPr>
@@ -29672,6 +30598,10 @@
             </a:solidFill>
           </a:ln>
         </p:spPr>
+        <p:txBody xmlns:a="http://schemas.openxmlformats.org/drawingml/2006/main">
+          <a:bodyPr/>
+          <a:p/>
+        </p:txBody>
       </p:sp>
       <p:sp>
         <p:nvSpPr>
@@ -29702,6 +30632,10 @@
             </a:solidFill>
           </a:ln>
         </p:spPr>
+        <p:txBody xmlns:a="http://schemas.openxmlformats.org/drawingml/2006/main">
+          <a:bodyPr/>
+          <a:p/>
+        </p:txBody>
       </p:sp>
       <p:sp>
         <p:nvSpPr>
@@ -31547,6 +32481,10 @@
             </a:solidFill>
           </a:ln>
         </p:spPr>
+        <p:txBody xmlns:a="http://schemas.openxmlformats.org/drawingml/2006/main">
+          <a:bodyPr/>
+          <a:p/>
+        </p:txBody>
       </p:sp>
       <p:sp>
         <p:nvSpPr>
@@ -31577,6 +32515,10 @@
             </a:solidFill>
           </a:ln>
         </p:spPr>
+        <p:txBody xmlns:a="http://schemas.openxmlformats.org/drawingml/2006/main">
+          <a:bodyPr/>
+          <a:p/>
+        </p:txBody>
       </p:sp>
       <p:sp>
         <p:nvSpPr>
@@ -31609,6 +32551,10 @@
             </a:solidFill>
           </a:ln>
         </p:spPr>
+        <p:txBody xmlns:a="http://schemas.openxmlformats.org/drawingml/2006/main">
+          <a:bodyPr/>
+          <a:p/>
+        </p:txBody>
       </p:sp>
       <p:sp>
         <p:nvSpPr>
@@ -31641,6 +32587,10 @@
             </a:solidFill>
           </a:ln>
         </p:spPr>
+        <p:txBody xmlns:a="http://schemas.openxmlformats.org/drawingml/2006/main">
+          <a:bodyPr/>
+          <a:p/>
+        </p:txBody>
       </p:sp>
       <p:sp>
         <p:nvSpPr>
@@ -31673,6 +32623,10 @@
             </a:solidFill>
           </a:ln>
         </p:spPr>
+        <p:txBody xmlns:a="http://schemas.openxmlformats.org/drawingml/2006/main">
+          <a:bodyPr/>
+          <a:p/>
+        </p:txBody>
       </p:sp>
       <p:sp>
         <p:nvSpPr>
@@ -31705,6 +32659,10 @@
             </a:solidFill>
           </a:ln>
         </p:spPr>
+        <p:txBody xmlns:a="http://schemas.openxmlformats.org/drawingml/2006/main">
+          <a:bodyPr/>
+          <a:p/>
+        </p:txBody>
       </p:sp>
       <p:sp>
         <p:nvSpPr>
@@ -31735,6 +32693,10 @@
             </a:solidFill>
           </a:ln>
         </p:spPr>
+        <p:txBody xmlns:a="http://schemas.openxmlformats.org/drawingml/2006/main">
+          <a:bodyPr/>
+          <a:p/>
+        </p:txBody>
       </p:sp>
       <p:sp>
         <p:nvSpPr>
@@ -31767,6 +32729,10 @@
             </a:solidFill>
           </a:ln>
         </p:spPr>
+        <p:txBody xmlns:a="http://schemas.openxmlformats.org/drawingml/2006/main">
+          <a:bodyPr/>
+          <a:p/>
+        </p:txBody>
       </p:sp>
       <p:sp>
         <p:nvSpPr>
@@ -32871,6 +33837,10 @@
             </a:solidFill>
           </a:ln>
         </p:spPr>
+        <p:txBody xmlns:a="http://schemas.openxmlformats.org/drawingml/2006/main">
+          <a:bodyPr/>
+          <a:p/>
+        </p:txBody>
       </p:sp>
       <p:sp>
         <p:nvSpPr>
@@ -32901,6 +33871,10 @@
             </a:solidFill>
           </a:ln>
         </p:spPr>
+        <p:txBody xmlns:a="http://schemas.openxmlformats.org/drawingml/2006/main">
+          <a:bodyPr/>
+          <a:p/>
+        </p:txBody>
       </p:sp>
       <p:sp>
         <p:nvSpPr>
@@ -32931,6 +33905,10 @@
             </a:solidFill>
           </a:ln>
         </p:spPr>
+        <p:txBody xmlns:a="http://schemas.openxmlformats.org/drawingml/2006/main">
+          <a:bodyPr/>
+          <a:p/>
+        </p:txBody>
       </p:sp>
       <p:sp>
         <p:nvSpPr>
@@ -32963,6 +33941,10 @@
             </a:solidFill>
           </a:ln>
         </p:spPr>
+        <p:txBody xmlns:a="http://schemas.openxmlformats.org/drawingml/2006/main">
+          <a:bodyPr/>
+          <a:p/>
+        </p:txBody>
       </p:sp>
       <p:sp>
         <p:nvSpPr>
@@ -32993,6 +33975,10 @@
             </a:solidFill>
           </a:ln>
         </p:spPr>
+        <p:txBody xmlns:a="http://schemas.openxmlformats.org/drawingml/2006/main">
+          <a:bodyPr/>
+          <a:p/>
+        </p:txBody>
       </p:sp>
       <p:sp>
         <p:nvSpPr>
@@ -33023,6 +34009,10 @@
             </a:solidFill>
           </a:ln>
         </p:spPr>
+        <p:txBody xmlns:a="http://schemas.openxmlformats.org/drawingml/2006/main">
+          <a:bodyPr/>
+          <a:p/>
+        </p:txBody>
       </p:sp>
       <p:sp>
         <p:nvSpPr>
@@ -33053,6 +34043,10 @@
             </a:solidFill>
           </a:ln>
         </p:spPr>
+        <p:txBody xmlns:a="http://schemas.openxmlformats.org/drawingml/2006/main">
+          <a:bodyPr/>
+          <a:p/>
+        </p:txBody>
       </p:sp>
       <p:sp>
         <p:nvSpPr>
@@ -33141,6 +34135,10 @@
             </a:solidFill>
           </a:ln>
         </p:spPr>
+        <p:txBody xmlns:a="http://schemas.openxmlformats.org/drawingml/2006/main">
+          <a:bodyPr/>
+          <a:p/>
+        </p:txBody>
       </p:sp>
       <p:sp>
         <p:nvSpPr>
@@ -33171,6 +34169,10 @@
             </a:solidFill>
           </a:ln>
         </p:spPr>
+        <p:txBody xmlns:a="http://schemas.openxmlformats.org/drawingml/2006/main">
+          <a:bodyPr/>
+          <a:p/>
+        </p:txBody>
       </p:sp>
       <p:sp>
         <p:nvSpPr>
@@ -33201,6 +34203,10 @@
             </a:solidFill>
           </a:ln>
         </p:spPr>
+        <p:txBody xmlns:a="http://schemas.openxmlformats.org/drawingml/2006/main">
+          <a:bodyPr/>
+          <a:p/>
+        </p:txBody>
       </p:sp>
       <p:sp>
         <p:nvSpPr>
@@ -33289,6 +34295,10 @@
             </a:solidFill>
           </a:ln>
         </p:spPr>
+        <p:txBody xmlns:a="http://schemas.openxmlformats.org/drawingml/2006/main">
+          <a:bodyPr/>
+          <a:p/>
+        </p:txBody>
       </p:sp>
       <p:sp>
         <p:nvSpPr>
@@ -33319,6 +34329,10 @@
             </a:solidFill>
           </a:ln>
         </p:spPr>
+        <p:txBody xmlns:a="http://schemas.openxmlformats.org/drawingml/2006/main">
+          <a:bodyPr/>
+          <a:p/>
+        </p:txBody>
       </p:sp>
       <p:sp>
         <p:nvSpPr>
@@ -33349,6 +34363,10 @@
             </a:solidFill>
           </a:ln>
         </p:spPr>
+        <p:txBody xmlns:a="http://schemas.openxmlformats.org/drawingml/2006/main">
+          <a:bodyPr/>
+          <a:p/>
+        </p:txBody>
       </p:sp>
       <p:sp>
         <p:nvSpPr>
@@ -33913,6 +34931,10 @@
             </a:solidFill>
           </a:ln>
         </p:spPr>
+        <p:txBody xmlns:a="http://schemas.openxmlformats.org/drawingml/2006/main">
+          <a:bodyPr/>
+          <a:p/>
+        </p:txBody>
       </p:sp>
       <p:sp>
         <p:nvSpPr>
@@ -33943,6 +34965,10 @@
             </a:solidFill>
           </a:ln>
         </p:spPr>
+        <p:txBody xmlns:a="http://schemas.openxmlformats.org/drawingml/2006/main">
+          <a:bodyPr/>
+          <a:p/>
+        </p:txBody>
       </p:sp>
       <p:sp>
         <p:nvSpPr>
@@ -33975,6 +35001,10 @@
             </a:solidFill>
           </a:ln>
         </p:spPr>
+        <p:txBody xmlns:a="http://schemas.openxmlformats.org/drawingml/2006/main">
+          <a:bodyPr/>
+          <a:p/>
+        </p:txBody>
       </p:sp>
       <p:sp>
         <p:nvSpPr>
@@ -34005,6 +35035,10 @@
             </a:solidFill>
           </a:ln>
         </p:spPr>
+        <p:txBody xmlns:a="http://schemas.openxmlformats.org/drawingml/2006/main">
+          <a:bodyPr/>
+          <a:p/>
+        </p:txBody>
       </p:sp>
       <p:sp>
         <p:nvSpPr>
@@ -34035,6 +35069,10 @@
             </a:solidFill>
           </a:ln>
         </p:spPr>
+        <p:txBody xmlns:a="http://schemas.openxmlformats.org/drawingml/2006/main">
+          <a:bodyPr/>
+          <a:p/>
+        </p:txBody>
       </p:sp>
       <p:sp>
         <p:nvSpPr>
